--- a/report/presentation.pptx
+++ b/report/presentation.pptx
@@ -791,7 +791,7 @@
           <a:lstStyle/>
           <a:p>
             <a:r>
-              <a:t>Binding is scored by classifying the colour of the box of each object, so detecting something red and something blue is not enough: the colour must sit on the right object. The validation labels were written by me with Claude's help from the images, then re-checked in a second pass; two ambiguous constraints were set aside. Please spot-check them. Yellow-green apples are read as green by CLIP, so counting prompts are judged on the count alone. Spatial accuracy rests on very few positive examples.</a:t>
+              <a:t>Binding is scored by classifying the colour of the box of each object, so detecting something red and something blue is not enough: the colour must sit on the right object. The validation labels were drafted by Claude from the images, adjusted in a second pass, and then revised by me; ambiguous constraints are set aside. Yellow-green apples are read as green by CLIP, so counting prompts are judged on the count alone. Spatial accuracy rests on very few positive examples.</a:t>
             </a:r>
           </a:p>
         </p:txBody>
@@ -5680,7 +5680,7 @@
               </a:defRPr>
             </a:pPr>
             <a:r>
-              <a:t>• Labels: one non-independent annotator (Claude), two passes; spatial has few positives</a:t>
+              <a:t>• Labels: drafted by Claude, second pass, revised by the owner; spatial has few positives</a:t>
             </a:r>
           </a:p>
         </p:txBody>
@@ -5865,7 +5865,7 @@
                         <a:defRPr sz="1400" b="0"/>
                       </a:pPr>
                       <a:r>
-                        <a:t>0.83</a:t>
+                        <a:t>0.89</a:t>
                       </a:r>
                     </a:p>
                   </a:txBody>
@@ -5880,7 +5880,7 @@
                         <a:defRPr sz="1400" b="0"/>
                       </a:pPr>
                       <a:r>
-                        <a:t>18</a:t>
+                        <a:t>16</a:t>
                       </a:r>
                     </a:p>
                   </a:txBody>
@@ -5959,7 +5959,7 @@
                         <a:defRPr sz="1400" b="0"/>
                       </a:pPr>
                       <a:r>
-                        <a:t>0.90</a:t>
+                        <a:t>0.89</a:t>
                       </a:r>
                     </a:p>
                   </a:txBody>
